--- a/stepik/razdel/03/presentation/output/presentation_stepik_3.pptx
+++ b/stepik/razdel/03/presentation/output/presentation_stepik_3.pptx
@@ -3787,7 +3787,7 @@
             </a:pPr>
             <a:r>
               <a:rPr/>
-              <a:t>Вопрос 9</a:t>
+              <a:t>Рисунок 9: Вопрос 9</a:t>
             </a:r>
           </a:p>
         </p:txBody>
@@ -3816,12 +3816,12 @@
       </p:grpSpPr>
       <p:sp>
         <p:nvSpPr>
-          <p:cNvPr id="3" name="Content Placeholder 2"/>
-          <p:cNvSpPr>
-            <a:spLocks noGrp="1"/>
-          </p:cNvSpPr>
-          <p:nvPr>
-            <p:ph idx="1"/>
+          <p:cNvPr id="2" name="Title 1"/>
+          <p:cNvSpPr>
+            <a:spLocks noGrp="1"/>
+          </p:cNvSpPr>
+          <p:nvPr>
+            <p:ph type="title"/>
           </p:nvPr>
         </p:nvSpPr>
         <p:spPr/>
@@ -3834,7 +3834,67 @@
             </a:pPr>
             <a:r>
               <a:rPr/>
-              <a:t> Вопрос 9 продолжение</a:t>
+              <a:t>Вопрос 9. Скрипт с двумя аргументами</a:t>
+            </a:r>
+          </a:p>
+        </p:txBody>
+      </p:sp>
+      <p:pic>
+        <p:nvPicPr>
+          <p:cNvPr descr="image/10.png" id="0" name="Picture 1"/>
+          <p:cNvPicPr>
+            <a:picLocks noGrp="1" noChangeAspect="1"/>
+          </p:cNvPicPr>
+          <p:nvPr/>
+        </p:nvPicPr>
+        <p:blipFill>
+          <a:blip r:embed="rId2"/>
+          <a:stretch>
+            <a:fillRect/>
+          </a:stretch>
+        </p:blipFill>
+        <p:spPr bwMode="auto">
+          <a:xfrm>
+            <a:off x="546100" y="1193800"/>
+            <a:ext cx="8051800" cy="2882900"/>
+          </a:xfrm>
+          <a:prstGeom prst="rect">
+            <a:avLst/>
+          </a:prstGeom>
+          <a:noFill/>
+          <a:ln w="9525">
+            <a:noFill/>
+            <a:headEnd/>
+            <a:tailEnd/>
+          </a:ln>
+        </p:spPr>
+      </p:pic>
+      <p:sp>
+        <p:nvSpPr>
+          <p:cNvPr id="1" name="TextBox 3"/>
+          <p:cNvSpPr txBox="1"/>
+          <p:nvPr/>
+        </p:nvSpPr>
+        <p:spPr>
+          <a:xfrm>
+            <a:off x="457200" y="4076700"/>
+            <a:ext cx="8229600" cy="508000"/>
+          </a:xfrm>
+          <a:prstGeom prst="rect">
+            <a:avLst/>
+          </a:prstGeom>
+          <a:noFill/>
+        </p:spPr>
+        <p:txBody>
+          <a:bodyPr/>
+          <a:lstStyle/>
+          <a:p>
+            <a:pPr lvl="0" indent="0" marL="0" algn="ctr">
+              <a:buNone/>
+            </a:pPr>
+            <a:r>
+              <a:rPr/>
+              <a:t>Рисунок 10: Вопрос 9 продолжение</a:t>
             </a:r>
           </a:p>
         </p:txBody>
@@ -3988,7 +4048,7 @@
             </a:pPr>
             <a:r>
               <a:rPr/>
-              <a:t>Вопрос 10</a:t>
+              <a:t>Рисунок 11: Вопрос 10</a:t>
             </a:r>
           </a:p>
         </p:txBody>
@@ -4017,12 +4077,12 @@
       </p:grpSpPr>
       <p:sp>
         <p:nvSpPr>
-          <p:cNvPr id="3" name="Content Placeholder 2"/>
-          <p:cNvSpPr>
-            <a:spLocks noGrp="1"/>
-          </p:cNvSpPr>
-          <p:nvPr>
-            <p:ph idx="1"/>
+          <p:cNvPr id="2" name="Title 1"/>
+          <p:cNvSpPr>
+            <a:spLocks noGrp="1"/>
+          </p:cNvSpPr>
+          <p:nvPr>
+            <p:ph type="title"/>
           </p:nvPr>
         </p:nvSpPr>
         <p:spPr/>
@@ -4035,7 +4095,67 @@
             </a:pPr>
             <a:r>
               <a:rPr/>
-              <a:t> Вопрос 10 продолжение</a:t>
+              <a:t>Вопрос 10. Условия, которые всегда истинны</a:t>
+            </a:r>
+          </a:p>
+        </p:txBody>
+      </p:sp>
+      <p:pic>
+        <p:nvPicPr>
+          <p:cNvPr descr="image/12.png" id="0" name="Picture 1"/>
+          <p:cNvPicPr>
+            <a:picLocks noGrp="1" noChangeAspect="1"/>
+          </p:cNvPicPr>
+          <p:nvPr/>
+        </p:nvPicPr>
+        <p:blipFill>
+          <a:blip r:embed="rId2"/>
+          <a:stretch>
+            <a:fillRect/>
+          </a:stretch>
+        </p:blipFill>
+        <p:spPr bwMode="auto">
+          <a:xfrm>
+            <a:off x="2679700" y="1193800"/>
+            <a:ext cx="3784600" cy="2882900"/>
+          </a:xfrm>
+          <a:prstGeom prst="rect">
+            <a:avLst/>
+          </a:prstGeom>
+          <a:noFill/>
+          <a:ln w="9525">
+            <a:noFill/>
+            <a:headEnd/>
+            <a:tailEnd/>
+          </a:ln>
+        </p:spPr>
+      </p:pic>
+      <p:sp>
+        <p:nvSpPr>
+          <p:cNvPr id="1" name="TextBox 3"/>
+          <p:cNvSpPr txBox="1"/>
+          <p:nvPr/>
+        </p:nvSpPr>
+        <p:spPr>
+          <a:xfrm>
+            <a:off x="457200" y="4076700"/>
+            <a:ext cx="8229600" cy="508000"/>
+          </a:xfrm>
+          <a:prstGeom prst="rect">
+            <a:avLst/>
+          </a:prstGeom>
+          <a:noFill/>
+        </p:spPr>
+        <p:txBody>
+          <a:bodyPr/>
+          <a:lstStyle/>
+          <a:p>
+            <a:pPr lvl="0" indent="0" marL="0" algn="ctr">
+              <a:buNone/>
+            </a:pPr>
+            <a:r>
+              <a:rPr/>
+              <a:t>Рисунок 12: Вопрос 10 продолжение</a:t>
             </a:r>
           </a:p>
         </p:txBody>
@@ -4189,7 +4309,7 @@
             </a:pPr>
             <a:r>
               <a:rPr/>
-              <a:t>Рисунок 9: Вопрос 11</a:t>
+              <a:t>Рисунок 13: Вопрос 11</a:t>
             </a:r>
           </a:p>
         </p:txBody>
@@ -4216,6 +4336,31 @@
           <a:chExt cx="0" cy="0"/>
         </a:xfrm>
       </p:grpSpPr>
+      <p:sp>
+        <p:nvSpPr>
+          <p:cNvPr id="2" name="Title 1"/>
+          <p:cNvSpPr>
+            <a:spLocks noGrp="1"/>
+          </p:cNvSpPr>
+          <p:nvPr>
+            <p:ph type="title"/>
+          </p:nvPr>
+        </p:nvSpPr>
+        <p:spPr/>
+        <p:txBody>
+          <a:bodyPr/>
+          <a:lstStyle/>
+          <a:p>
+            <a:pPr lvl="0" indent="0" marL="0">
+              <a:buNone/>
+            </a:pPr>
+            <a:r>
+              <a:rPr/>
+              <a:t>Вопрос 11. Скрипт для определения возрастной группы</a:t>
+            </a:r>
+          </a:p>
+        </p:txBody>
+      </p:sp>
       <p:pic>
         <p:nvPicPr>
           <p:cNvPr descr="image/17.png" id="0" name="Picture 1"/>
@@ -4271,7 +4416,7 @@
             </a:pPr>
             <a:r>
               <a:rPr/>
-              <a:t>Рисунок 10: Вопрос 11 продолжение</a:t>
+              <a:t>Рисунок 14: Вопрос 11 продолжение</a:t>
             </a:r>
           </a:p>
         </p:txBody>
@@ -4446,7 +4591,7 @@
             </a:pPr>
             <a:r>
               <a:rPr/>
-              <a:t>Рисунок 11: Вопрос 12</a:t>
+              <a:t>Рисунок 15: Вопрос 12</a:t>
             </a:r>
           </a:p>
         </p:txBody>
@@ -4610,7 +4755,7 @@
             </a:pPr>
             <a:r>
               <a:rPr/>
-              <a:t>Рисунок 12: Вопрос 13</a:t>
+              <a:t>Рисунок 16: Вопрос 13</a:t>
             </a:r>
           </a:p>
         </p:txBody>
@@ -4689,6 +4834,41 @@
           <a:chExt cx="0" cy="0"/>
         </a:xfrm>
       </p:grpSpPr>
+      <p:sp>
+        <p:nvSpPr>
+          <p:cNvPr id="2" name="Title 1"/>
+          <p:cNvSpPr>
+            <a:spLocks noGrp="1"/>
+          </p:cNvSpPr>
+          <p:nvPr>
+            <p:ph type="title"/>
+          </p:nvPr>
+        </p:nvSpPr>
+        <p:spPr/>
+        <p:txBody>
+          <a:bodyPr/>
+          <a:lstStyle/>
+          <a:p>
+            <a:pPr lvl="0" indent="0" marL="0">
+              <a:buNone/>
+            </a:pPr>
+            <a:r>
+              <a:rPr/>
+              <a:t>Вопрос 13. Что выведет echo “</a:t>
+            </a:r>
+            <a:r>
+              <a:rPr>
+                <a:latin typeface="Courier"/>
+              </a:rPr>
+              <a:t>pwd</a:t>
+            </a:r>
+            <a:r>
+              <a:rPr/>
+              <a:t>”</a:t>
+            </a:r>
+          </a:p>
+        </p:txBody>
+      </p:sp>
       <p:pic>
         <p:nvPicPr>
           <p:cNvPr descr="image/20.png" id="0" name="Picture 1"/>
@@ -4744,7 +4924,7 @@
             </a:pPr>
             <a:r>
               <a:rPr/>
-              <a:t>Рисунок 13: Вопрос 13 продолжение</a:t>
+              <a:t>Рисунок 17: Вопрос 13 продолжение</a:t>
             </a:r>
           </a:p>
         </p:txBody>
@@ -4898,7 +5078,7 @@
             </a:pPr>
             <a:r>
               <a:rPr/>
-              <a:t>Рисунок 14: Вопрос 14</a:t>
+              <a:t>Рисунок 18: Вопрос 14</a:t>
             </a:r>
           </a:p>
         </p:txBody>
@@ -5052,7 +5232,7 @@
             </a:pPr>
             <a:r>
               <a:rPr/>
-              <a:t>Рисунок 15: Вопрос 15</a:t>
+              <a:t>Рисунок 19: Вопрос 15</a:t>
             </a:r>
           </a:p>
         </p:txBody>
@@ -5206,7 +5386,7 @@
             </a:pPr>
             <a:r>
               <a:rPr/>
-              <a:t>Рисунок 16: Вопрос 16</a:t>
+              <a:t>Рисунок 20: Вопрос 16</a:t>
             </a:r>
           </a:p>
         </p:txBody>
@@ -5233,6 +5413,31 @@
           <a:chExt cx="0" cy="0"/>
         </a:xfrm>
       </p:grpSpPr>
+      <p:sp>
+        <p:nvSpPr>
+          <p:cNvPr id="2" name="Title 1"/>
+          <p:cNvSpPr>
+            <a:spLocks noGrp="1"/>
+          </p:cNvSpPr>
+          <p:nvPr>
+            <p:ph type="title"/>
+          </p:nvPr>
+        </p:nvSpPr>
+        <p:spPr/>
+        <p:txBody>
+          <a:bodyPr/>
+          <a:lstStyle/>
+          <a:p>
+            <a:pPr lvl="0" indent="0" marL="0">
+              <a:buNone/>
+            </a:pPr>
+            <a:r>
+              <a:rPr/>
+              <a:t>Вопрос 16. Нахождение НОД</a:t>
+            </a:r>
+          </a:p>
+        </p:txBody>
+      </p:sp>
       <p:pic>
         <p:nvPicPr>
           <p:cNvPr descr="image/24.png" id="0" name="Picture 1"/>
@@ -5288,7 +5493,7 @@
             </a:pPr>
             <a:r>
               <a:rPr/>
-              <a:t>Рисунок 17: Вопрос 16 продолжение</a:t>
+              <a:t>Рисунок 21: Вопрос 16 продолжение</a:t>
             </a:r>
           </a:p>
         </p:txBody>
@@ -5442,7 +5647,7 @@
             </a:pPr>
             <a:r>
               <a:rPr/>
-              <a:t>Рисунок 18: Вопрос 17</a:t>
+              <a:t>Рисунок 22: Вопрос 17</a:t>
             </a:r>
           </a:p>
         </p:txBody>
@@ -5469,6 +5674,31 @@
           <a:chExt cx="0" cy="0"/>
         </a:xfrm>
       </p:grpSpPr>
+      <p:sp>
+        <p:nvSpPr>
+          <p:cNvPr id="2" name="Title 1"/>
+          <p:cNvSpPr>
+            <a:spLocks noGrp="1"/>
+          </p:cNvSpPr>
+          <p:nvPr>
+            <p:ph type="title"/>
+          </p:nvPr>
+        </p:nvSpPr>
+        <p:spPr/>
+        <p:txBody>
+          <a:bodyPr/>
+          <a:lstStyle/>
+          <a:p>
+            <a:pPr lvl="0" indent="0" marL="0">
+              <a:buNone/>
+            </a:pPr>
+            <a:r>
+              <a:rPr/>
+              <a:t>Вопрос 17. Калькулятор</a:t>
+            </a:r>
+          </a:p>
+        </p:txBody>
+      </p:sp>
       <p:pic>
         <p:nvPicPr>
           <p:cNvPr descr="image/26.png" id="0" name="Picture 1"/>
@@ -5524,7 +5754,7 @@
             </a:pPr>
             <a:r>
               <a:rPr/>
-              <a:t>Рисунок 19: Вопрос 17 продолжение</a:t>
+              <a:t>Рисунок 23: Вопрос 17 продолжение</a:t>
             </a:r>
           </a:p>
         </p:txBody>
@@ -5678,7 +5908,7 @@
             </a:pPr>
             <a:r>
               <a:rPr/>
-              <a:t>Рисунок 20: Вопрос 18</a:t>
+              <a:t>Рисунок 24: Вопрос 18</a:t>
             </a:r>
           </a:p>
         </p:txBody>
@@ -5832,7 +6062,7 @@
             </a:pPr>
             <a:r>
               <a:rPr/>
-              <a:t>Рисунок 21: Вопрос 19</a:t>
+              <a:t>Рисунок 25: Вопрос 19</a:t>
             </a:r>
           </a:p>
         </p:txBody>
@@ -5986,7 +6216,7 @@
             </a:pPr>
             <a:r>
               <a:rPr/>
-              <a:t>Рисунок 22: Вопрос 20</a:t>
+              <a:t>Рисунок 26: Вопрос 20</a:t>
             </a:r>
           </a:p>
         </p:txBody>
@@ -6238,7 +6468,7 @@
             </a:pPr>
             <a:r>
               <a:rPr/>
-              <a:t>Рисунок 23: Вопрос 21</a:t>
+              <a:t>Рисунок 27: Вопрос 21</a:t>
             </a:r>
           </a:p>
         </p:txBody>
@@ -6392,7 +6622,7 @@
             </a:pPr>
             <a:r>
               <a:rPr/>
-              <a:t>Рисунок 24: Вопрос 22</a:t>
+              <a:t>Рисунок 28: Вопрос 22</a:t>
             </a:r>
           </a:p>
         </p:txBody>
@@ -6546,7 +6776,7 @@
             </a:pPr>
             <a:r>
               <a:rPr/>
-              <a:t>Рисунок 25: Вопрос 23</a:t>
+              <a:t>Рисунок 29: Вопрос 23</a:t>
             </a:r>
           </a:p>
         </p:txBody>
@@ -6700,7 +6930,7 @@
             </a:pPr>
             <a:r>
               <a:rPr/>
-              <a:t>Рисунок 26: Вопрос 24</a:t>
+              <a:t>Рисунок 30: Вопрос 24</a:t>
             </a:r>
           </a:p>
         </p:txBody>
@@ -6854,7 +7084,7 @@
             </a:pPr>
             <a:r>
               <a:rPr/>
-              <a:t>Рисунок 27: Вопрос 25</a:t>
+              <a:t>Рисунок 31: Вопрос 25</a:t>
             </a:r>
           </a:p>
         </p:txBody>
@@ -7008,7 +7238,7 @@
             </a:pPr>
             <a:r>
               <a:rPr/>
-              <a:t>Рисунок 28: Вопрос 26</a:t>
+              <a:t>Рисунок 32: Вопрос 26</a:t>
             </a:r>
           </a:p>
         </p:txBody>
@@ -7174,7 +7404,7 @@
             </a:pPr>
             <a:r>
               <a:rPr/>
-              <a:t>Рисунок 29: Вопрос 27</a:t>
+              <a:t>Рисунок 33: Вопрос 27</a:t>
             </a:r>
           </a:p>
         </p:txBody>
@@ -7328,7 +7558,7 @@
             </a:pPr>
             <a:r>
               <a:rPr/>
-              <a:t>Рисунок 30: Вопрос 28</a:t>
+              <a:t>Рисунок 34: Вопрос 28</a:t>
             </a:r>
           </a:p>
         </p:txBody>
@@ -7482,7 +7712,7 @@
             </a:pPr>
             <a:r>
               <a:rPr/>
-              <a:t>Рисунок 31: Вопрос 29</a:t>
+              <a:t>Рисунок 35: Вопрос 29</a:t>
             </a:r>
           </a:p>
         </p:txBody>
@@ -7636,7 +7866,7 @@
             </a:pPr>
             <a:r>
               <a:rPr/>
-              <a:t>Рисунок 32: Вопрос 30</a:t>
+              <a:t>Рисунок 36: Вопрос 30</a:t>
             </a:r>
           </a:p>
         </p:txBody>
@@ -7944,7 +8174,7 @@
             </a:pPr>
             <a:r>
               <a:rPr/>
-              <a:t>Рисунок 33: Вопрос 31</a:t>
+              <a:t>Рисунок 37: Вопрос 31</a:t>
             </a:r>
           </a:p>
         </p:txBody>
@@ -8098,7 +8328,7 @@
             </a:pPr>
             <a:r>
               <a:rPr/>
-              <a:t>Рисунок 34: Вопрос 32</a:t>
+              <a:t>Рисунок 38: Вопрос 32</a:t>
             </a:r>
           </a:p>
         </p:txBody>

--- a/stepik/razdel/03/presentation/output/presentation_stepik_3.pptx
+++ b/stepik/razdel/03/presentation/output/presentation_stepik_3.pptx
@@ -5005,7 +5005,7 @@
             </a:r>
             <a:r>
               <a:rPr/>
-              <a:t> Сначала запустить program, затем if [[ $? -eq 0 ]]</a:t>
+              <a:t> Сначала запустить program, затем if [[ $? -eq 0 ]], if ‘program &gt; some_file.txt’</a:t>
             </a:r>
           </a:p>
           <a:p>
@@ -6143,7 +6143,7 @@
             </a:r>
             <a:r>
               <a:rPr/>
-              <a:t> Ни один файл найден не будет</a:t>
+              <a:t> Все кроме file3</a:t>
             </a:r>
           </a:p>
           <a:p>
@@ -6156,7 +6156,27 @@
             </a:r>
             <a:r>
               <a:rPr/>
-              <a:t> file1, file2, file3 лежат на глубине 1, а диапазон 2-3.</a:t>
+              <a:t> Команда </a:t>
+            </a:r>
+            <a:r>
+              <a:rPr>
+                <a:latin typeface="Courier"/>
+              </a:rPr>
+              <a:t>find /home/bi -mindepth 2 -maxdepth 3 -name "file*"</a:t>
+            </a:r>
+            <a:r>
+              <a:rPr/>
+              <a:t> ищет файлы на глубине 2 или 3. file1 и file2 лежат на глубине 1 (прямо в </a:t>
+            </a:r>
+            <a:r>
+              <a:rPr>
+                <a:latin typeface="Courier"/>
+              </a:rPr>
+              <a:t>/home/bi</a:t>
+            </a:r>
+            <a:r>
+              <a:rPr/>
+              <a:t>), file3 лежит внутри поддиректории на глубине 2. Поэтому найдётся только file3, а file1 и file2 — нет.</a:t>
             </a:r>
           </a:p>
         </p:txBody>
@@ -6395,7 +6415,7 @@
             </a:r>
             <a:r>
               <a:rPr/>
-              <a:t> grep -C 1 “word” file.txt &gt; results.txt</a:t>
+              <a:t> results.txt будет одинакового размера во всех случаях</a:t>
             </a:r>
           </a:p>
           <a:p>
@@ -6408,7 +6428,97 @@
             </a:r>
             <a:r>
               <a:rPr/>
-              <a:t> -C 1 выводит строку + строку до и после. Это больше, чем -A 1 или -B 1.</a:t>
+              <a:t> Команда </a:t>
+            </a:r>
+            <a:r>
+              <a:rPr>
+                <a:latin typeface="Courier"/>
+              </a:rPr>
+              <a:t>grep "word" file.txt &gt; results.txt</a:t>
+            </a:r>
+            <a:r>
+              <a:rPr/>
+              <a:t> выводит только строки с совпадением. </a:t>
+            </a:r>
+            <a:r>
+              <a:rPr>
+                <a:latin typeface="Courier"/>
+              </a:rPr>
+              <a:t>grep -A 1</a:t>
+            </a:r>
+            <a:r>
+              <a:rPr/>
+              <a:t>, </a:t>
+            </a:r>
+            <a:r>
+              <a:rPr>
+                <a:latin typeface="Courier"/>
+              </a:rPr>
+              <a:t>-B 1</a:t>
+            </a:r>
+            <a:r>
+              <a:rPr/>
+              <a:t> и </a:t>
+            </a:r>
+            <a:r>
+              <a:rPr>
+                <a:latin typeface="Courier"/>
+              </a:rPr>
+              <a:t>-C 1</a:t>
+            </a:r>
+            <a:r>
+              <a:rPr/>
+              <a:t> выводят дополнительную строку до или после, но в файле </a:t>
+            </a:r>
+            <a:r>
+              <a:rPr>
+                <a:latin typeface="Courier"/>
+              </a:rPr>
+              <a:t>file.txt</a:t>
+            </a:r>
+            <a:r>
+              <a:rPr/>
+              <a:t> из 10 строк каждая строка содержит слово “word”. Поэтому при использовании </a:t>
+            </a:r>
+            <a:r>
+              <a:rPr>
+                <a:latin typeface="Courier"/>
+              </a:rPr>
+              <a:t>-A 1</a:t>
+            </a:r>
+            <a:r>
+              <a:rPr/>
+              <a:t>, </a:t>
+            </a:r>
+            <a:r>
+              <a:rPr>
+                <a:latin typeface="Courier"/>
+              </a:rPr>
+              <a:t>-B 1</a:t>
+            </a:r>
+            <a:r>
+              <a:rPr/>
+              <a:t> и </a:t>
+            </a:r>
+            <a:r>
+              <a:rPr>
+                <a:latin typeface="Courier"/>
+              </a:rPr>
+              <a:t>-C 1</a:t>
+            </a:r>
+            <a:r>
+              <a:rPr/>
+              <a:t> каждая найденная строка будет сопровождаться дополнительной строкой, и общий размер output-файла будет одинаковым во всех трёх случаях (больше, чем при обычном </a:t>
+            </a:r>
+            <a:r>
+              <a:rPr>
+                <a:latin typeface="Courier"/>
+              </a:rPr>
+              <a:t>grep</a:t>
+            </a:r>
+            <a:r>
+              <a:rPr/>
+              <a:t>). Однако во всех трёх вариантах с опциями размер будет одинаковый.</a:t>
             </a:r>
           </a:p>
         </p:txBody>
@@ -7485,7 +7595,7 @@
             </a:r>
             <a:r>
               <a:rPr/>
-              <a:t> chmod u+wx file.txt; chmod g+w file.txt</a:t>
+              <a:t> chmod u+wx file.txt</a:t>
             </a:r>
           </a:p>
           <a:p>
@@ -7639,7 +7749,7 @@
             </a:r>
             <a:r>
               <a:rPr/>
-              <a:t> - sudo chown user dir - sudo chown :group dir</a:t>
+              <a:t> - sudo chown user dir</a:t>
             </a:r>
           </a:p>
           <a:p>
@@ -8255,7 +8365,7 @@
             </a:r>
             <a:r>
               <a:rPr/>
-              <a:t> На экран будет выведено всё содержимое файла</a:t>
+              <a:t> Каждая строчка будет выведена два раза</a:t>
             </a:r>
           </a:p>
           <a:p>
@@ -8268,7 +8378,47 @@
             </a:r>
             <a:r>
               <a:rPr/>
-              <a:t> Без -n sed печатает все строки по умолчанию. Команда p не меняет этого.</a:t>
+              <a:t> Без опции </a:t>
+            </a:r>
+            <a:r>
+              <a:rPr>
+                <a:latin typeface="Courier"/>
+              </a:rPr>
+              <a:t>-n</a:t>
+            </a:r>
+            <a:r>
+              <a:rPr/>
+              <a:t> sed по умолчанию печатает каждую строку. Команда </a:t>
+            </a:r>
+            <a:r>
+              <a:rPr>
+                <a:latin typeface="Courier"/>
+              </a:rPr>
+              <a:t>p</a:t>
+            </a:r>
+            <a:r>
+              <a:rPr/>
+              <a:t> (print) дополнительно печатает строки, удовлетворяющие шаблону. В результате строки, которые подходят под регулярное выражение </a:t>
+            </a:r>
+            <a:r>
+              <a:rPr>
+                <a:latin typeface="Courier"/>
+              </a:rPr>
+              <a:t>/[a-z]*/</a:t>
+            </a:r>
+            <a:r>
+              <a:rPr/>
+              <a:t>, выводятся дважды: один раз по умолчанию, второй раз — по команде </a:t>
+            </a:r>
+            <a:r>
+              <a:rPr>
+                <a:latin typeface="Courier"/>
+              </a:rPr>
+              <a:t>p</a:t>
+            </a:r>
+            <a:r>
+              <a:rPr/>
+              <a:t>. Остальные строки выводятся один раз.</a:t>
             </a:r>
           </a:p>
         </p:txBody>
@@ -8728,7 +8878,7 @@
             </a:r>
             <a:r>
               <a:rPr/>
-              <a:t> d2wwywPp</a:t>
+              <a:t> d2wwywPp, didthree four four four five, d2w$bifour</a:t>
             </a:r>
           </a:p>
           <a:p>
